--- a/Arquitectura de Sistemas Computacionales/Clases/Presentacion del Curso - Arquitectura de Sistemas Computacionales.pptx
+++ b/Arquitectura de Sistemas Computacionales/Clases/Presentacion del Curso - Arquitectura de Sistemas Computacionales.pptx
@@ -6931,7 +6931,7 @@
                 </a:solidFill>
                 <a:latin typeface="Calibri"/>
               </a:rPr>
-              <a:t>Quiz / cierre</a:t>
+              <a:t>cierre</a:t>
             </a:r>
             <a:r>
               <a:rPr sz="1600" b="0" i="0">
@@ -6985,7 +6985,7 @@
                 </a:solidFill>
                 <a:latin typeface="Calibri"/>
               </a:rPr>
-              <a:t>virtual</a:t>
+              <a:t>virtual síncrona</a:t>
             </a:r>
             <a:r>
               <a:rPr sz="1600" b="0" i="0">
@@ -6994,7 +6994,7 @@
                 </a:solidFill>
                 <a:latin typeface="Calibri"/>
               </a:rPr>
-              <a:t> síncrona; festivos = </a:t>
+              <a:t>; festivos = </a:t>
             </a:r>
             <a:r>
               <a:rPr sz="1600" b="1" i="0">
@@ -7003,7 +7003,7 @@
                 </a:solidFill>
                 <a:latin typeface="Calibri"/>
               </a:rPr>
-              <a:t>autónoma</a:t>
+              <a:t>clase autónoma</a:t>
             </a:r>
             <a:r>
               <a:rPr sz="1600" b="0" i="0">

--- a/Arquitectura de Sistemas Computacionales/Clases/Presentacion del Curso - Arquitectura de Sistemas Computacionales.pptx
+++ b/Arquitectura de Sistemas Computacionales/Clases/Presentacion del Curso - Arquitectura de Sistemas Computacionales.pptx
@@ -7543,7 +7543,7 @@
                 </a:solidFill>
                 <a:latin typeface="Calibri"/>
               </a:rPr>
-              <a:t>–   Talleres / Quiz · 10%</a:t>
+              <a:t>–   Talleres o Quiz · 10%</a:t>
             </a:r>
           </a:p>
           <a:p>
@@ -7823,7 +7823,7 @@
                 </a:solidFill>
                 <a:latin typeface="Calibri"/>
               </a:rPr>
-              <a:t>–   Talleres / Quiz · 10%</a:t>
+              <a:t>–   Talleres o Quiz · 10%</a:t>
             </a:r>
           </a:p>
           <a:p>

--- a/Arquitectura de Sistemas Computacionales/Clases/Presentacion del Curso - Arquitectura de Sistemas Computacionales.pptx
+++ b/Arquitectura de Sistemas Computacionales/Clases/Presentacion del Curso - Arquitectura de Sistemas Computacionales.pptx
@@ -7064,7 +7064,7 @@
                 </a:solidFill>
                 <a:latin typeface="Calibri"/>
               </a:rPr>
-              <a:t> (no es la plataforma oficial de la UNIAJC, la usamos solo para esto).</a:t>
+              <a:t> (https://examlab.lovable.app/) — no es la plataforma oficial de la UNIAJC, la usamos solo para esto.</a:t>
             </a:r>
           </a:p>
           <a:p>

--- a/Arquitectura de Sistemas Computacionales/Clases/Presentacion del Curso - Arquitectura de Sistemas Computacionales.pptx
+++ b/Arquitectura de Sistemas Computacionales/Clases/Presentacion del Curso - Arquitectura de Sistemas Computacionales.pptx
@@ -14265,7 +14265,7 @@
         <p:spPr>
           <a:xfrm>
             <a:off x="2560320" y="2057400"/>
-            <a:ext cx="9174175" cy="1472184"/>
+            <a:ext cx="9174300" cy="1446900"/>
           </a:xfrm>
           <a:prstGeom prst="rect">
             <a:avLst/>
@@ -14348,7 +14348,39 @@
                 <a:cs typeface="Calibri"/>
                 <a:sym typeface="Calibri"/>
               </a:rPr>
-              <a:t>Líder Técnico · Speaker Tecnológico</a:t>
+              <a:t>Líder Técnico </a:t>
+            </a:r>
+            <a:endParaRPr sz="1700">
+              <a:solidFill>
+                <a:srgbClr val="333333"/>
+              </a:solidFill>
+              <a:latin typeface="Calibri"/>
+              <a:ea typeface="Calibri"/>
+              <a:cs typeface="Calibri"/>
+              <a:sym typeface="Calibri"/>
+            </a:endParaRPr>
+          </a:p>
+          <a:p>
+            <a:pPr indent="0" lvl="0" marL="0" marR="0" rtl="0" algn="l">
+              <a:spcBef>
+                <a:spcPts val="800"/>
+              </a:spcBef>
+              <a:spcAft>
+                <a:spcPts val="0"/>
+              </a:spcAft>
+              <a:buNone/>
+            </a:pPr>
+            <a:r>
+              <a:rPr b="0" i="0" lang="en-US" sz="1700">
+                <a:solidFill>
+                  <a:srgbClr val="333333"/>
+                </a:solidFill>
+                <a:latin typeface="Calibri"/>
+                <a:ea typeface="Calibri"/>
+                <a:cs typeface="Calibri"/>
+                <a:sym typeface="Calibri"/>
+              </a:rPr>
+              <a:t>Speaker Tecnológico</a:t>
             </a:r>
             <a:endParaRPr/>
           </a:p>
@@ -15508,7 +15540,7 @@
         <p:spPr>
           <a:xfrm>
             <a:off x="457200" y="1170432"/>
-            <a:ext cx="11277295" cy="5230368"/>
+            <a:ext cx="11277300" cy="2986200"/>
           </a:xfrm>
           <a:prstGeom prst="rect">
             <a:avLst/>
@@ -15534,7 +15566,7 @@
               <a:buNone/>
             </a:pPr>
             <a:r>
-              <a:rPr b="0" i="0" lang="en-US" sz="1600">
+              <a:rPr b="0" i="0" lang="en-US" sz="2400">
                 <a:solidFill>
                   <a:srgbClr val="333333"/>
                 </a:solidFill>
@@ -15546,7 +15578,7 @@
               <a:t>–   Comprender y aplicar modelos de </a:t>
             </a:r>
             <a:r>
-              <a:rPr b="1" i="0" lang="en-US" sz="1600">
+              <a:rPr b="1" i="0" lang="en-US" sz="2400">
                 <a:solidFill>
                   <a:srgbClr val="333333"/>
                 </a:solidFill>
@@ -15558,7 +15590,7 @@
               <a:t>infraestructura moderna</a:t>
             </a:r>
             <a:r>
-              <a:rPr b="0" i="0" lang="en-US" sz="1600">
+              <a:rPr b="0" i="0" lang="en-US" sz="2400">
                 <a:solidFill>
                   <a:srgbClr val="333333"/>
                 </a:solidFill>
@@ -15569,7 +15601,7 @@
               </a:rPr>
               <a:t> con enfoque en arquitecturas en la nube.</a:t>
             </a:r>
-            <a:endParaRPr/>
+            <a:endParaRPr sz="2400"/>
           </a:p>
           <a:p>
             <a:pPr indent="0" lvl="0" marL="0" marR="0" rtl="0" algn="l">
@@ -15582,7 +15614,7 @@
               <a:buNone/>
             </a:pPr>
             <a:r>
-              <a:rPr b="0" i="0" lang="en-US" sz="1600">
+              <a:rPr b="0" i="0" lang="en-US" sz="2400">
                 <a:solidFill>
                   <a:srgbClr val="333333"/>
                 </a:solidFill>
@@ -15593,7 +15625,7 @@
               </a:rPr>
               <a:t>–   Diseñar, desplegar y optimizar sistemas distribuidos, escalables y seguros.</a:t>
             </a:r>
-            <a:endParaRPr/>
+            <a:endParaRPr sz="2400"/>
           </a:p>
           <a:p>
             <a:pPr indent="0" lvl="0" marL="0" marR="0" rtl="0" algn="l">
@@ -15606,7 +15638,7 @@
               <a:buNone/>
             </a:pPr>
             <a:r>
-              <a:rPr b="0" i="0" lang="en-US" sz="1600">
+              <a:rPr b="0" i="0" lang="en-US" sz="2400">
                 <a:solidFill>
                   <a:srgbClr val="333333"/>
                 </a:solidFill>
@@ -15618,7 +15650,7 @@
               <a:t>–   Práctica al servicio del </a:t>
             </a:r>
             <a:r>
-              <a:rPr b="1" i="0" lang="en-US" sz="1600">
+              <a:rPr b="1" i="0" lang="en-US" sz="2400">
                 <a:solidFill>
                   <a:srgbClr val="333333"/>
                 </a:solidFill>
@@ -15630,7 +15662,7 @@
               <a:t>Proyecto Integrador CloudLite</a:t>
             </a:r>
             <a:r>
-              <a:rPr b="0" i="0" lang="en-US" sz="1600">
+              <a:rPr b="0" i="0" lang="en-US" sz="2400">
                 <a:solidFill>
                   <a:srgbClr val="333333"/>
                 </a:solidFill>
@@ -15641,7 +15673,7 @@
               </a:rPr>
               <a:t> (diagramas, labs gratis, CI/CD conceptual).</a:t>
             </a:r>
-            <a:endParaRPr/>
+            <a:endParaRPr sz="2400"/>
           </a:p>
           <a:p>
             <a:pPr indent="0" lvl="0" marL="0" marR="0" rtl="0" algn="l">
@@ -15654,7 +15686,7 @@
               <a:buNone/>
             </a:pPr>
             <a:r>
-              <a:rPr b="0" i="0" lang="en-US" sz="1600">
+              <a:rPr b="0" i="0" lang="en-US" sz="2400">
                 <a:solidFill>
                   <a:srgbClr val="333333"/>
                 </a:solidFill>
@@ -15666,7 +15698,7 @@
               <a:t>–   </a:t>
             </a:r>
             <a:r>
-              <a:rPr b="1" i="0" lang="en-US" sz="1600">
+              <a:rPr b="1" i="0" lang="en-US" sz="2400">
                 <a:solidFill>
                   <a:srgbClr val="333333"/>
                 </a:solidFill>
@@ -15678,7 +15710,7 @@
               <a:t>Objeto de estudio:</a:t>
             </a:r>
             <a:r>
-              <a:rPr b="0" i="0" lang="en-US" sz="1600">
+              <a:rPr b="0" i="0" lang="en-US" sz="2400">
                 <a:solidFill>
                   <a:srgbClr val="333333"/>
                 </a:solidFill>
@@ -15689,7 +15721,7 @@
               </a:rPr>
               <a:t> diseño, implementación y gestión de arquitecturas en entornos cloud.</a:t>
             </a:r>
-            <a:endParaRPr/>
+            <a:endParaRPr sz="2400"/>
           </a:p>
         </p:txBody>
       </p:sp>
@@ -15950,7 +15982,7 @@
         <p:spPr>
           <a:xfrm>
             <a:off x="457200" y="1170432"/>
-            <a:ext cx="11277295" cy="5230368"/>
+            <a:ext cx="11277300" cy="2247300"/>
           </a:xfrm>
           <a:prstGeom prst="rect">
             <a:avLst/>
@@ -15976,7 +16008,7 @@
               <a:buNone/>
             </a:pPr>
             <a:r>
-              <a:rPr b="0" i="0" lang="en-US" sz="1600">
+              <a:rPr b="0" i="0" lang="en-US" sz="2400">
                 <a:solidFill>
                   <a:srgbClr val="333333"/>
                 </a:solidFill>
@@ -15988,7 +16020,7 @@
               <a:t>–   </a:t>
             </a:r>
             <a:r>
-              <a:rPr b="1" i="0" lang="en-US" sz="1600">
+              <a:rPr b="1" i="0" lang="en-US" sz="2400">
                 <a:solidFill>
                   <a:srgbClr val="333333"/>
                 </a:solidFill>
@@ -16000,7 +16032,7 @@
               <a:t>Objetivo:</a:t>
             </a:r>
             <a:r>
-              <a:rPr b="0" i="0" lang="en-US" sz="1600">
+              <a:rPr b="0" i="0" lang="en-US" sz="2400">
                 <a:solidFill>
                   <a:srgbClr val="333333"/>
                 </a:solidFill>
@@ -16011,7 +16043,7 @@
               </a:rPr>
               <a:t> diseñar e implementar arquitecturas con cloud, virtualización y escalabilidad.</a:t>
             </a:r>
-            <a:endParaRPr/>
+            <a:endParaRPr sz="2400"/>
           </a:p>
           <a:p>
             <a:pPr indent="0" lvl="0" marL="0" marR="0" rtl="0" algn="l">
@@ -16024,7 +16056,7 @@
               <a:buNone/>
             </a:pPr>
             <a:r>
-              <a:rPr b="0" i="0" lang="en-US" sz="1600">
+              <a:rPr b="0" i="0" lang="en-US" sz="2400">
                 <a:solidFill>
                   <a:srgbClr val="333333"/>
                 </a:solidFill>
@@ -16036,7 +16068,7 @@
               <a:t>–   </a:t>
             </a:r>
             <a:r>
-              <a:rPr b="1" i="0" lang="en-US" sz="1600">
+              <a:rPr b="1" i="0" lang="en-US" sz="2400">
                 <a:solidFill>
                   <a:srgbClr val="333333"/>
                 </a:solidFill>
@@ -16048,7 +16080,7 @@
               <a:t>RAA1</a:t>
             </a:r>
             <a:r>
-              <a:rPr b="0" i="0" lang="en-US" sz="1600">
+              <a:rPr b="0" i="0" lang="en-US" sz="2400">
                 <a:solidFill>
                   <a:srgbClr val="333333"/>
                 </a:solidFill>
@@ -16059,7 +16091,7 @@
               </a:rPr>
               <a:t> — Comprende y aplica modelos de servicio cloud (IaaS, PaaS, SaaS).</a:t>
             </a:r>
-            <a:endParaRPr/>
+            <a:endParaRPr sz="2400"/>
           </a:p>
           <a:p>
             <a:pPr indent="0" lvl="0" marL="0" marR="0" rtl="0" algn="l">
@@ -16072,7 +16104,7 @@
               <a:buNone/>
             </a:pPr>
             <a:r>
-              <a:rPr b="0" i="0" lang="en-US" sz="1600">
+              <a:rPr b="0" i="0" lang="en-US" sz="2400">
                 <a:solidFill>
                   <a:srgbClr val="333333"/>
                 </a:solidFill>
@@ -16084,7 +16116,7 @@
               <a:t>–   </a:t>
             </a:r>
             <a:r>
-              <a:rPr b="1" i="0" lang="en-US" sz="1600">
+              <a:rPr b="1" i="0" lang="en-US" sz="2400">
                 <a:solidFill>
                   <a:srgbClr val="333333"/>
                 </a:solidFill>
@@ -16096,7 +16128,7 @@
               <a:t>RAA2</a:t>
             </a:r>
             <a:r>
-              <a:rPr b="0" i="0" lang="en-US" sz="1600">
+              <a:rPr b="0" i="0" lang="en-US" sz="2400">
                 <a:solidFill>
                   <a:srgbClr val="333333"/>
                 </a:solidFill>
@@ -16107,7 +16139,7 @@
               </a:rPr>
               <a:t> — Configura entornos virtualizados y despliega sistemas distribuidos.</a:t>
             </a:r>
-            <a:endParaRPr/>
+            <a:endParaRPr sz="2400"/>
           </a:p>
           <a:p>
             <a:pPr indent="0" lvl="0" marL="0" marR="0" rtl="0" algn="l">
@@ -16120,7 +16152,7 @@
               <a:buNone/>
             </a:pPr>
             <a:r>
-              <a:rPr b="0" i="0" lang="en-US" sz="1600">
+              <a:rPr b="0" i="0" lang="en-US" sz="2400">
                 <a:solidFill>
                   <a:srgbClr val="333333"/>
                 </a:solidFill>
@@ -16132,7 +16164,7 @@
               <a:t>–   </a:t>
             </a:r>
             <a:r>
-              <a:rPr b="1" i="0" lang="en-US" sz="1600">
+              <a:rPr b="1" i="0" lang="en-US" sz="2400">
                 <a:solidFill>
                   <a:srgbClr val="333333"/>
                 </a:solidFill>
@@ -16144,7 +16176,7 @@
               <a:t>RAA3</a:t>
             </a:r>
             <a:r>
-              <a:rPr b="0" i="0" lang="en-US" sz="1600">
+              <a:rPr b="0" i="0" lang="en-US" sz="2400">
                 <a:solidFill>
                   <a:srgbClr val="333333"/>
                 </a:solidFill>
@@ -16155,7 +16187,7 @@
               </a:rPr>
               <a:t> — Evalúa seguridad, rendimiento y sostenibilidad de arquitecturas en la nube.</a:t>
             </a:r>
-            <a:endParaRPr/>
+            <a:endParaRPr sz="2400"/>
           </a:p>
         </p:txBody>
       </p:sp>
@@ -16416,7 +16448,7 @@
         <p:spPr>
           <a:xfrm>
             <a:off x="457200" y="1170432"/>
-            <a:ext cx="11277295" cy="5230368"/>
+            <a:ext cx="11277300" cy="4566300"/>
           </a:xfrm>
           <a:prstGeom prst="rect">
             <a:avLst/>
@@ -16442,7 +16474,7 @@
               <a:buNone/>
             </a:pPr>
             <a:r>
-              <a:rPr b="0" i="0" lang="en-US" sz="1600">
+              <a:rPr b="0" i="0" lang="en-US" sz="2400">
                 <a:solidFill>
                   <a:srgbClr val="333333"/>
                 </a:solidFill>
@@ -16454,7 +16486,7 @@
               <a:t>–   </a:t>
             </a:r>
             <a:r>
-              <a:rPr b="1" i="0" lang="en-US" sz="1600">
+              <a:rPr b="1" i="0" lang="en-US" sz="2400">
                 <a:solidFill>
                   <a:srgbClr val="333333"/>
                 </a:solidFill>
@@ -16466,7 +16498,7 @@
               <a:t>Sesión 0 (hoy)</a:t>
             </a:r>
             <a:r>
-              <a:rPr b="0" i="0" lang="en-US" sz="1600">
+              <a:rPr b="0" i="0" lang="en-US" sz="2400">
                 <a:solidFill>
                   <a:srgbClr val="333333"/>
                 </a:solidFill>
@@ -16478,7 +16510,7 @@
               <a:t> = encuadre del curso + evaluación + </a:t>
             </a:r>
             <a:r>
-              <a:rPr b="1" i="0" lang="en-US" sz="1600">
+              <a:rPr b="1" i="0" lang="en-US" sz="2400">
                 <a:solidFill>
                   <a:srgbClr val="333333"/>
                 </a:solidFill>
@@ -16490,7 +16522,7 @@
               <a:t>socialización del Proyecto Integrador CloudLite</a:t>
             </a:r>
             <a:r>
-              <a:rPr b="0" i="0" lang="en-US" sz="1600">
+              <a:rPr b="0" i="0" lang="en-US" sz="2400">
                 <a:solidFill>
                   <a:srgbClr val="333333"/>
                 </a:solidFill>
@@ -16501,7 +16533,7 @@
               </a:rPr>
               <a:t> + herramientas.</a:t>
             </a:r>
-            <a:endParaRPr/>
+            <a:endParaRPr sz="2400"/>
           </a:p>
           <a:p>
             <a:pPr indent="0" lvl="0" marL="0" marR="0" rtl="0" algn="l">
@@ -16514,7 +16546,7 @@
               <a:buNone/>
             </a:pPr>
             <a:r>
-              <a:rPr b="0" i="0" lang="en-US" sz="1600">
+              <a:rPr b="0" i="0" lang="en-US" sz="2400">
                 <a:solidFill>
                   <a:srgbClr val="333333"/>
                 </a:solidFill>
@@ -16526,7 +16558,7 @@
               <a:t>–   </a:t>
             </a:r>
             <a:r>
-              <a:rPr b="1" i="0" lang="en-US" sz="1600">
+              <a:rPr b="1" i="0" lang="en-US" sz="2400">
                 <a:solidFill>
                   <a:srgbClr val="333333"/>
                 </a:solidFill>
@@ -16538,7 +16570,7 @@
               <a:t>Clase 1</a:t>
             </a:r>
             <a:r>
-              <a:rPr b="0" i="0" lang="en-US" sz="1600">
+              <a:rPr b="0" i="0" lang="en-US" sz="2400">
                 <a:solidFill>
                   <a:srgbClr val="333333"/>
                 </a:solidFill>
@@ -16549,7 +16581,7 @@
               </a:rPr>
               <a:t> = diagnóstico + arranque del primer tema (introducción a arquitecturas cloud) — mismo bloque de hoy.</a:t>
             </a:r>
-            <a:endParaRPr/>
+            <a:endParaRPr sz="2400"/>
           </a:p>
           <a:p>
             <a:pPr indent="0" lvl="0" marL="0" marR="0" rtl="0" algn="l">
@@ -16562,7 +16594,7 @@
               <a:buNone/>
             </a:pPr>
             <a:r>
-              <a:rPr b="0" i="0" lang="en-US" sz="1600">
+              <a:rPr b="0" i="0" lang="en-US" sz="2400">
                 <a:solidFill>
                   <a:srgbClr val="333333"/>
                 </a:solidFill>
@@ -16574,7 +16606,7 @@
               <a:t>–   De la Clase 2 en adelante, cada sesión sigue la misma estructura: </a:t>
             </a:r>
             <a:r>
-              <a:rPr b="1" i="0" lang="en-US" sz="1600">
+              <a:rPr b="1" i="0" lang="en-US" sz="2400">
                 <a:solidFill>
                   <a:srgbClr val="333333"/>
                 </a:solidFill>
@@ -16586,7 +16618,7 @@
               <a:t>Teoría Core breve</a:t>
             </a:r>
             <a:r>
-              <a:rPr b="0" i="0" lang="en-US" sz="1600">
+              <a:rPr b="0" i="0" lang="en-US" sz="2400">
                 <a:solidFill>
                   <a:srgbClr val="333333"/>
                 </a:solidFill>
@@ -16598,7 +16630,7 @@
               <a:t> → </a:t>
             </a:r>
             <a:r>
-              <a:rPr b="1" i="0" lang="en-US" sz="1600">
+              <a:rPr b="1" i="0" lang="en-US" sz="2400">
                 <a:solidFill>
                   <a:srgbClr val="333333"/>
                 </a:solidFill>
@@ -16610,7 +16642,7 @@
               <a:t>Taller PI CloudLite</a:t>
             </a:r>
             <a:r>
-              <a:rPr b="0" i="0" lang="en-US" sz="1600">
+              <a:rPr b="0" i="0" lang="en-US" sz="2400">
                 <a:solidFill>
                   <a:srgbClr val="333333"/>
                 </a:solidFill>
@@ -16622,7 +16654,7 @@
               <a:t> → </a:t>
             </a:r>
             <a:r>
-              <a:rPr b="1" i="0" lang="en-US" sz="1600">
+              <a:rPr b="1" i="0" lang="en-US" sz="2400">
                 <a:solidFill>
                   <a:srgbClr val="333333"/>
                 </a:solidFill>
@@ -16634,7 +16666,7 @@
               <a:t>cierre</a:t>
             </a:r>
             <a:r>
-              <a:rPr b="0" i="0" lang="en-US" sz="1600">
+              <a:rPr b="0" i="0" lang="en-US" sz="2400">
                 <a:solidFill>
                   <a:srgbClr val="333333"/>
                 </a:solidFill>
@@ -16646,7 +16678,7 @@
               <a:t>. Modalidad: Clase 1 y parciales (</a:t>
             </a:r>
             <a:r>
-              <a:rPr b="1" i="0" lang="en-US" sz="1600">
+              <a:rPr b="1" i="0" lang="en-US" sz="2400">
                 <a:solidFill>
                   <a:srgbClr val="333333"/>
                 </a:solidFill>
@@ -16658,7 +16690,7 @@
               <a:t>5 / 9 / 14</a:t>
             </a:r>
             <a:r>
-              <a:rPr b="0" i="0" lang="en-US" sz="1600">
+              <a:rPr b="0" i="0" lang="en-US" sz="2400">
                 <a:solidFill>
                   <a:srgbClr val="333333"/>
                 </a:solidFill>
@@ -16670,7 +16702,7 @@
               <a:t>) </a:t>
             </a:r>
             <a:r>
-              <a:rPr b="1" i="0" lang="en-US" sz="1600">
+              <a:rPr b="1" i="0" lang="en-US" sz="2400">
                 <a:solidFill>
                   <a:srgbClr val="333333"/>
                 </a:solidFill>
@@ -16682,7 +16714,7 @@
               <a:t>presencial</a:t>
             </a:r>
             <a:r>
-              <a:rPr b="0" i="0" lang="en-US" sz="1600">
+              <a:rPr b="0" i="0" lang="en-US" sz="2400">
                 <a:solidFill>
                   <a:srgbClr val="333333"/>
                 </a:solidFill>
@@ -16694,7 +16726,7 @@
               <a:t>; resto </a:t>
             </a:r>
             <a:r>
-              <a:rPr b="1" i="0" lang="en-US" sz="1600">
+              <a:rPr b="1" i="0" lang="en-US" sz="2400">
                 <a:solidFill>
                   <a:srgbClr val="333333"/>
                 </a:solidFill>
@@ -16706,7 +16738,7 @@
               <a:t>virtual síncrona</a:t>
             </a:r>
             <a:r>
-              <a:rPr b="0" i="0" lang="en-US" sz="1600">
+              <a:rPr b="0" i="0" lang="en-US" sz="2400">
                 <a:solidFill>
                   <a:srgbClr val="333333"/>
                 </a:solidFill>
@@ -16718,7 +16750,7 @@
               <a:t>; festivos = </a:t>
             </a:r>
             <a:r>
-              <a:rPr b="1" i="0" lang="en-US" sz="1600">
+              <a:rPr b="1" i="0" lang="en-US" sz="2400">
                 <a:solidFill>
                   <a:srgbClr val="333333"/>
                 </a:solidFill>
@@ -16730,7 +16762,7 @@
               <a:t>clase autónoma</a:t>
             </a:r>
             <a:r>
-              <a:rPr b="0" i="0" lang="en-US" sz="1600">
+              <a:rPr b="0" i="0" lang="en-US" sz="2400">
                 <a:solidFill>
                   <a:srgbClr val="333333"/>
                 </a:solidFill>
@@ -16741,7 +16773,7 @@
               </a:rPr>
               <a:t>.</a:t>
             </a:r>
-            <a:endParaRPr/>
+            <a:endParaRPr sz="2400"/>
           </a:p>
           <a:p>
             <a:pPr indent="0" lvl="0" marL="0" marR="0" rtl="0" algn="l">
@@ -16754,7 +16786,7 @@
               <a:buNone/>
             </a:pPr>
             <a:r>
-              <a:rPr b="0" i="0" lang="en-US" sz="1600">
+              <a:rPr b="0" i="0" lang="en-US" sz="2400">
                 <a:solidFill>
                   <a:srgbClr val="333333"/>
                 </a:solidFill>
@@ -16766,7 +16798,7 @@
               <a:t>–   Herramientas </a:t>
             </a:r>
             <a:r>
-              <a:rPr b="1" i="0" lang="en-US" sz="1600">
+              <a:rPr b="1" i="0" lang="en-US" sz="2400">
                 <a:solidFill>
                   <a:srgbClr val="333333"/>
                 </a:solidFill>
@@ -16778,7 +16810,7 @@
               <a:t>gratis + navegador</a:t>
             </a:r>
             <a:r>
-              <a:rPr b="0" i="0" lang="en-US" sz="1600">
+              <a:rPr b="0" i="0" lang="en-US" sz="2400">
                 <a:solidFill>
                   <a:srgbClr val="333333"/>
                 </a:solidFill>
@@ -16790,7 +16822,7 @@
               <a:t> (sin cloud de pago ni Docker Desktop). Talleres y quices/parciales se entregan/presentan en </a:t>
             </a:r>
             <a:r>
-              <a:rPr b="1" i="0" lang="en-US" sz="1600">
+              <a:rPr b="1" i="0" lang="en-US" sz="2400">
                 <a:solidFill>
                   <a:srgbClr val="333333"/>
                 </a:solidFill>
@@ -16802,7 +16834,7 @@
               <a:t>ExamLab</a:t>
             </a:r>
             <a:r>
-              <a:rPr b="0" i="0" lang="en-US" sz="1600">
+              <a:rPr b="0" i="0" lang="en-US" sz="2400">
                 <a:solidFill>
                   <a:srgbClr val="333333"/>
                 </a:solidFill>
@@ -16813,7 +16845,7 @@
               </a:rPr>
               <a:t> (https://examlab.lovable.app/) — no es la plataforma oficial de la UNIAJC, la usamos solo para esto.</a:t>
             </a:r>
-            <a:endParaRPr/>
+            <a:endParaRPr sz="2400"/>
           </a:p>
           <a:p>
             <a:pPr indent="0" lvl="0" marL="0" marR="0" rtl="0" algn="l">
@@ -16826,7 +16858,7 @@
               <a:buNone/>
             </a:pPr>
             <a:r>
-              <a:rPr b="0" i="0" lang="en-US" sz="1600">
+              <a:rPr b="0" i="0" lang="en-US" sz="2400">
                 <a:solidFill>
                   <a:srgbClr val="333333"/>
                 </a:solidFill>
@@ -16838,7 +16870,7 @@
               <a:t>–   Hilo conductor de todo el semestre: </a:t>
             </a:r>
             <a:r>
-              <a:rPr b="1" i="0" lang="en-US" sz="1600">
+              <a:rPr b="1" i="0" lang="en-US" sz="2400">
                 <a:solidFill>
                   <a:srgbClr val="333333"/>
                 </a:solidFill>
@@ -16850,7 +16882,7 @@
               <a:t>Proyecto Integrador CloudLite</a:t>
             </a:r>
             <a:r>
-              <a:rPr b="0" i="0" lang="en-US" sz="1600">
+              <a:rPr b="0" i="0" lang="en-US" sz="2400">
                 <a:solidFill>
                   <a:srgbClr val="333333"/>
                 </a:solidFill>
@@ -16861,7 +16893,7 @@
               </a:rPr>
               <a:t>.</a:t>
             </a:r>
-            <a:endParaRPr/>
+            <a:endParaRPr sz="2400"/>
           </a:p>
         </p:txBody>
       </p:sp>
@@ -18664,7 +18696,7 @@
         <p:spPr>
           <a:xfrm>
             <a:off x="548640" y="1453895"/>
-            <a:ext cx="5364327" cy="4946904"/>
+            <a:ext cx="5364300" cy="4225200"/>
           </a:xfrm>
           <a:prstGeom prst="rect">
             <a:avLst/>
@@ -18690,7 +18722,7 @@
               <a:buNone/>
             </a:pPr>
             <a:r>
-              <a:rPr b="0" i="0" lang="en-US" sz="1200">
+              <a:rPr b="0" i="0" lang="en-US" sz="1800">
                 <a:solidFill>
                   <a:srgbClr val="333333"/>
                 </a:solidFill>
@@ -18702,7 +18734,7 @@
               <a:t>–   </a:t>
             </a:r>
             <a:r>
-              <a:rPr b="1" i="0" lang="en-US" sz="1200">
+              <a:rPr b="1" i="0" lang="en-US" sz="1800">
                 <a:solidFill>
                   <a:srgbClr val="333333"/>
                 </a:solidFill>
@@ -18714,7 +18746,7 @@
               <a:t>Sesión 0 –</a:t>
             </a:r>
             <a:r>
-              <a:rPr b="0" i="0" lang="en-US" sz="1200">
+              <a:rPr b="0" i="0" lang="en-US" sz="1800">
                 <a:solidFill>
                   <a:srgbClr val="333333"/>
                 </a:solidFill>
@@ -18725,7 +18757,7 @@
               </a:rPr>
               <a:t> Presentación del curso: logística, evaluación y socialización del PI CloudLite (10/08)</a:t>
             </a:r>
-            <a:endParaRPr/>
+            <a:endParaRPr sz="1800"/>
           </a:p>
           <a:p>
             <a:pPr indent="0" lvl="0" marL="0" marR="0" rtl="0" algn="l">
@@ -18738,7 +18770,7 @@
               <a:buNone/>
             </a:pPr>
             <a:r>
-              <a:rPr b="0" i="0" lang="en-US" sz="1200">
+              <a:rPr b="0" i="0" lang="en-US" sz="1800">
                 <a:solidFill>
                   <a:srgbClr val="333333"/>
                 </a:solidFill>
@@ -18750,7 +18782,7 @@
               <a:t>–   </a:t>
             </a:r>
             <a:r>
-              <a:rPr b="1" i="0" lang="en-US" sz="1200">
+              <a:rPr b="1" i="0" lang="en-US" sz="1800">
                 <a:solidFill>
                   <a:srgbClr val="333333"/>
                 </a:solidFill>
@@ -18762,7 +18794,7 @@
               <a:t>Clase 1 –</a:t>
             </a:r>
             <a:r>
-              <a:rPr b="0" i="0" lang="en-US" sz="1200">
+              <a:rPr b="0" i="0" lang="en-US" sz="1800">
                 <a:solidFill>
                   <a:srgbClr val="333333"/>
                 </a:solidFill>
@@ -18773,7 +18805,7 @@
               </a:rPr>
               <a:t> Diagnóstico · Introducción a arquitecturas cloud (10/08)</a:t>
             </a:r>
-            <a:endParaRPr/>
+            <a:endParaRPr sz="1800"/>
           </a:p>
           <a:p>
             <a:pPr indent="0" lvl="0" marL="0" marR="0" rtl="0" algn="l">
@@ -18786,7 +18818,7 @@
               <a:buNone/>
             </a:pPr>
             <a:r>
-              <a:rPr b="0" i="0" lang="en-US" sz="1200">
+              <a:rPr b="0" i="0" lang="en-US" sz="1800">
                 <a:solidFill>
                   <a:srgbClr val="333333"/>
                 </a:solidFill>
@@ -18798,7 +18830,7 @@
               <a:t>–   </a:t>
             </a:r>
             <a:r>
-              <a:rPr b="1" i="0" lang="en-US" sz="1200">
+              <a:rPr b="1" i="0" lang="en-US" sz="1800">
                 <a:solidFill>
                   <a:srgbClr val="333333"/>
                 </a:solidFill>
@@ -18810,7 +18842,7 @@
               <a:t>Clase 2 –</a:t>
             </a:r>
             <a:r>
-              <a:rPr b="0" i="0" lang="en-US" sz="1200">
+              <a:rPr b="0" i="0" lang="en-US" sz="1800">
                 <a:solidFill>
                   <a:srgbClr val="333333"/>
                 </a:solidFill>
@@ -18821,7 +18853,7 @@
               </a:rPr>
               <a:t> Modelos de servicio IaaS / PaaS / SaaS (17/08) · Autónoma</a:t>
             </a:r>
-            <a:endParaRPr/>
+            <a:endParaRPr sz="1800"/>
           </a:p>
           <a:p>
             <a:pPr indent="0" lvl="0" marL="0" marR="0" rtl="0" algn="l">
@@ -18834,7 +18866,7 @@
               <a:buNone/>
             </a:pPr>
             <a:r>
-              <a:rPr b="0" i="0" lang="en-US" sz="1200">
+              <a:rPr b="0" i="0" lang="en-US" sz="1800">
                 <a:solidFill>
                   <a:srgbClr val="333333"/>
                 </a:solidFill>
@@ -18846,7 +18878,7 @@
               <a:t>–   </a:t>
             </a:r>
             <a:r>
-              <a:rPr b="1" i="0" lang="en-US" sz="1200">
+              <a:rPr b="1" i="0" lang="en-US" sz="1800">
                 <a:solidFill>
                   <a:srgbClr val="333333"/>
                 </a:solidFill>
@@ -18858,7 +18890,7 @@
               <a:t>Clase 3 –</a:t>
             </a:r>
             <a:r>
-              <a:rPr b="0" i="0" lang="en-US" sz="1200">
+              <a:rPr b="0" i="0" lang="en-US" sz="1800">
                 <a:solidFill>
                   <a:srgbClr val="333333"/>
                 </a:solidFill>
@@ -18869,7 +18901,7 @@
               </a:rPr>
               <a:t> Virtualización y contenedores (24/08)</a:t>
             </a:r>
-            <a:endParaRPr/>
+            <a:endParaRPr sz="1800"/>
           </a:p>
           <a:p>
             <a:pPr indent="0" lvl="0" marL="0" marR="0" rtl="0" algn="l">
@@ -18882,7 +18914,7 @@
               <a:buNone/>
             </a:pPr>
             <a:r>
-              <a:rPr b="0" i="0" lang="en-US" sz="1200">
+              <a:rPr b="0" i="0" lang="en-US" sz="1800">
                 <a:solidFill>
                   <a:srgbClr val="333333"/>
                 </a:solidFill>
@@ -18894,7 +18926,7 @@
               <a:t>–   </a:t>
             </a:r>
             <a:r>
-              <a:rPr b="1" i="0" lang="en-US" sz="1200">
+              <a:rPr b="1" i="0" lang="en-US" sz="1800">
                 <a:solidFill>
                   <a:srgbClr val="333333"/>
                 </a:solidFill>
@@ -18906,7 +18938,7 @@
               <a:t>Clase 4 –</a:t>
             </a:r>
             <a:r>
-              <a:rPr b="0" i="0" lang="en-US" sz="1200">
+              <a:rPr b="0" i="0" lang="en-US" sz="1800">
                 <a:solidFill>
                   <a:srgbClr val="333333"/>
                 </a:solidFill>
@@ -18917,7 +18949,7 @@
               </a:rPr>
               <a:t> Microservicios y arquitecturas distribuidas (31/08)</a:t>
             </a:r>
-            <a:endParaRPr/>
+            <a:endParaRPr sz="1800"/>
           </a:p>
           <a:p>
             <a:pPr indent="0" lvl="0" marL="0" marR="0" rtl="0" algn="l">
@@ -18930,7 +18962,7 @@
               <a:buNone/>
             </a:pPr>
             <a:r>
-              <a:rPr b="0" i="0" lang="en-US" sz="1200">
+              <a:rPr b="0" i="0" lang="en-US" sz="1800">
                 <a:solidFill>
                   <a:srgbClr val="333333"/>
                 </a:solidFill>
@@ -18942,7 +18974,7 @@
               <a:t>–   </a:t>
             </a:r>
             <a:r>
-              <a:rPr b="1" i="0" lang="en-US" sz="1200">
+              <a:rPr b="1" i="0" lang="en-US" sz="1800">
                 <a:solidFill>
                   <a:srgbClr val="333333"/>
                 </a:solidFill>
@@ -18954,7 +18986,7 @@
               <a:t>Clase 5 –</a:t>
             </a:r>
             <a:r>
-              <a:rPr b="0" i="0" lang="en-US" sz="1200">
+              <a:rPr b="0" i="0" lang="en-US" sz="1800">
                 <a:solidFill>
                   <a:srgbClr val="333333"/>
                 </a:solidFill>
@@ -18965,7 +18997,7 @@
               </a:rPr>
               <a:t> Parcial 1 (07/09) · Parcial 1 · presencial</a:t>
             </a:r>
-            <a:endParaRPr/>
+            <a:endParaRPr sz="1800"/>
           </a:p>
           <a:p>
             <a:pPr indent="0" lvl="0" marL="0" marR="0" rtl="0" algn="l">
@@ -18978,7 +19010,7 @@
               <a:buNone/>
             </a:pPr>
             <a:r>
-              <a:rPr b="0" i="0" lang="en-US" sz="1200">
+              <a:rPr b="0" i="0" lang="en-US" sz="1800">
                 <a:solidFill>
                   <a:srgbClr val="333333"/>
                 </a:solidFill>
@@ -18990,7 +19022,7 @@
               <a:t>–   </a:t>
             </a:r>
             <a:r>
-              <a:rPr b="1" i="0" lang="en-US" sz="1200">
+              <a:rPr b="1" i="0" lang="en-US" sz="1800">
                 <a:solidFill>
                   <a:srgbClr val="333333"/>
                 </a:solidFill>
@@ -19002,7 +19034,7 @@
               <a:t>Clase 6 –</a:t>
             </a:r>
             <a:r>
-              <a:rPr b="0" i="0" lang="en-US" sz="1200">
+              <a:rPr b="0" i="0" lang="en-US" sz="1800">
                 <a:solidFill>
                   <a:srgbClr val="333333"/>
                 </a:solidFill>
@@ -19013,7 +19045,7 @@
               </a:rPr>
               <a:t> Seguridad en la nube (14/09)</a:t>
             </a:r>
-            <a:endParaRPr/>
+            <a:endParaRPr sz="1800"/>
           </a:p>
           <a:p>
             <a:pPr indent="0" lvl="0" marL="0" marR="0" rtl="0" algn="l">
@@ -19026,7 +19058,7 @@
               <a:buNone/>
             </a:pPr>
             <a:r>
-              <a:rPr b="0" i="0" lang="en-US" sz="1200">
+              <a:rPr b="0" i="0" lang="en-US" sz="1800">
                 <a:solidFill>
                   <a:srgbClr val="333333"/>
                 </a:solidFill>
@@ -19038,7 +19070,7 @@
               <a:t>–   </a:t>
             </a:r>
             <a:r>
-              <a:rPr b="1" i="0" lang="en-US" sz="1200">
+              <a:rPr b="1" i="0" lang="en-US" sz="1800">
                 <a:solidFill>
                   <a:srgbClr val="333333"/>
                 </a:solidFill>
@@ -19050,7 +19082,7 @@
               <a:t>Clase 7 –</a:t>
             </a:r>
             <a:r>
-              <a:rPr b="0" i="0" lang="en-US" sz="1200">
+              <a:rPr b="0" i="0" lang="en-US" sz="1800">
                 <a:solidFill>
                   <a:srgbClr val="333333"/>
                 </a:solidFill>
@@ -19061,7 +19093,7 @@
               </a:rPr>
               <a:t> Redes y almacenamiento cloud (21/09)</a:t>
             </a:r>
-            <a:endParaRPr/>
+            <a:endParaRPr sz="1800"/>
           </a:p>
         </p:txBody>
       </p:sp>
@@ -19074,7 +19106,7 @@
         <p:spPr>
           <a:xfrm>
             <a:off x="6187287" y="1453895"/>
-            <a:ext cx="5364327" cy="4946904"/>
+            <a:ext cx="5364300" cy="4502100"/>
           </a:xfrm>
           <a:prstGeom prst="rect">
             <a:avLst/>
@@ -19100,7 +19132,7 @@
               <a:buNone/>
             </a:pPr>
             <a:r>
-              <a:rPr b="0" i="0" lang="en-US" sz="1200">
+              <a:rPr b="0" i="0" lang="en-US" sz="1800">
                 <a:solidFill>
                   <a:srgbClr val="333333"/>
                 </a:solidFill>
@@ -19112,7 +19144,7 @@
               <a:t>–   </a:t>
             </a:r>
             <a:r>
-              <a:rPr b="1" i="0" lang="en-US" sz="1200">
+              <a:rPr b="1" i="0" lang="en-US" sz="1800">
                 <a:solidFill>
                   <a:srgbClr val="333333"/>
                 </a:solidFill>
@@ -19124,7 +19156,7 @@
               <a:t>Clase 8 –</a:t>
             </a:r>
             <a:r>
-              <a:rPr b="0" i="0" lang="en-US" sz="1200">
+              <a:rPr b="0" i="0" lang="en-US" sz="1800">
                 <a:solidFill>
                   <a:srgbClr val="333333"/>
                 </a:solidFill>
@@ -19135,7 +19167,7 @@
               </a:rPr>
               <a:t> Monitoreo, optimización y CI/CD (28/09)</a:t>
             </a:r>
-            <a:endParaRPr/>
+            <a:endParaRPr sz="1800"/>
           </a:p>
           <a:p>
             <a:pPr indent="0" lvl="0" marL="0" marR="0" rtl="0" algn="l">
@@ -19148,7 +19180,7 @@
               <a:buNone/>
             </a:pPr>
             <a:r>
-              <a:rPr b="0" i="0" lang="en-US" sz="1200">
+              <a:rPr b="0" i="0" lang="en-US" sz="1800">
                 <a:solidFill>
                   <a:srgbClr val="333333"/>
                 </a:solidFill>
@@ -19160,7 +19192,7 @@
               <a:t>–   </a:t>
             </a:r>
             <a:r>
-              <a:rPr b="1" i="0" lang="en-US" sz="1200">
+              <a:rPr b="1" i="0" lang="en-US" sz="1800">
                 <a:solidFill>
                   <a:srgbClr val="333333"/>
                 </a:solidFill>
@@ -19172,7 +19204,7 @@
               <a:t>Clase 9 –</a:t>
             </a:r>
             <a:r>
-              <a:rPr b="0" i="0" lang="en-US" sz="1200">
+              <a:rPr b="0" i="0" lang="en-US" sz="1800">
                 <a:solidFill>
                   <a:srgbClr val="333333"/>
                 </a:solidFill>
@@ -19183,7 +19215,7 @@
               </a:rPr>
               <a:t> Parcial 2 (05/10) · Parcial 2 · presencial</a:t>
             </a:r>
-            <a:endParaRPr/>
+            <a:endParaRPr sz="1800"/>
           </a:p>
           <a:p>
             <a:pPr indent="0" lvl="0" marL="0" marR="0" rtl="0" algn="l">
@@ -19196,7 +19228,7 @@
               <a:buNone/>
             </a:pPr>
             <a:r>
-              <a:rPr b="0" i="0" lang="en-US" sz="1200">
+              <a:rPr b="0" i="0" lang="en-US" sz="1800">
                 <a:solidFill>
                   <a:srgbClr val="333333"/>
                 </a:solidFill>
@@ -19208,7 +19240,7 @@
               <a:t>–   </a:t>
             </a:r>
             <a:r>
-              <a:rPr b="1" i="0" lang="en-US" sz="1200">
+              <a:rPr b="1" i="0" lang="en-US" sz="1800">
                 <a:solidFill>
                   <a:srgbClr val="333333"/>
                 </a:solidFill>
@@ -19220,7 +19252,7 @@
               <a:t>Clase 10 –</a:t>
             </a:r>
             <a:r>
-              <a:rPr b="0" i="0" lang="en-US" sz="1200">
+              <a:rPr b="0" i="0" lang="en-US" sz="1800">
                 <a:solidFill>
                   <a:srgbClr val="333333"/>
                 </a:solidFill>
@@ -19231,7 +19263,7 @@
               </a:rPr>
               <a:t> Costos y sostenibilidad cloud (12/10) · Autónoma</a:t>
             </a:r>
-            <a:endParaRPr/>
+            <a:endParaRPr sz="1800"/>
           </a:p>
           <a:p>
             <a:pPr indent="0" lvl="0" marL="0" marR="0" rtl="0" algn="l">
@@ -19244,7 +19276,7 @@
               <a:buNone/>
             </a:pPr>
             <a:r>
-              <a:rPr b="0" i="0" lang="en-US" sz="1200">
+              <a:rPr b="0" i="0" lang="en-US" sz="1800">
                 <a:solidFill>
                   <a:srgbClr val="333333"/>
                 </a:solidFill>
@@ -19256,7 +19288,7 @@
               <a:t>–   </a:t>
             </a:r>
             <a:r>
-              <a:rPr b="1" i="0" lang="en-US" sz="1200">
+              <a:rPr b="1" i="0" lang="en-US" sz="1800">
                 <a:solidFill>
                   <a:srgbClr val="333333"/>
                 </a:solidFill>
@@ -19268,7 +19300,7 @@
               <a:t>Clase 11 –</a:t>
             </a:r>
             <a:r>
-              <a:rPr b="0" i="0" lang="en-US" sz="1200">
+              <a:rPr b="0" i="0" lang="en-US" sz="1800">
                 <a:solidFill>
                   <a:srgbClr val="333333"/>
                 </a:solidFill>
@@ -19279,7 +19311,7 @@
               </a:rPr>
               <a:t> Avance del proyecto final (CloudLite) (19/10)</a:t>
             </a:r>
-            <a:endParaRPr/>
+            <a:endParaRPr sz="1800"/>
           </a:p>
           <a:p>
             <a:pPr indent="0" lvl="0" marL="0" marR="0" rtl="0" algn="l">
@@ -19292,7 +19324,7 @@
               <a:buNone/>
             </a:pPr>
             <a:r>
-              <a:rPr b="0" i="0" lang="en-US" sz="1200">
+              <a:rPr b="0" i="0" lang="en-US" sz="1800">
                 <a:solidFill>
                   <a:srgbClr val="333333"/>
                 </a:solidFill>
@@ -19304,7 +19336,7 @@
               <a:t>–   </a:t>
             </a:r>
             <a:r>
-              <a:rPr b="1" i="0" lang="en-US" sz="1200">
+              <a:rPr b="1" i="0" lang="en-US" sz="1800">
                 <a:solidFill>
                   <a:srgbClr val="333333"/>
                 </a:solidFill>
@@ -19316,7 +19348,7 @@
               <a:t>Clase 12 –</a:t>
             </a:r>
             <a:r>
-              <a:rPr b="0" i="0" lang="en-US" sz="1200">
+              <a:rPr b="0" i="0" lang="en-US" sz="1800">
                 <a:solidFill>
                   <a:srgbClr val="333333"/>
                 </a:solidFill>
@@ -19327,7 +19359,7 @@
               </a:rPr>
               <a:t> Pruebas de rendimiento y preparación final (26/10)</a:t>
             </a:r>
-            <a:endParaRPr/>
+            <a:endParaRPr sz="1800"/>
           </a:p>
           <a:p>
             <a:pPr indent="0" lvl="0" marL="0" marR="0" rtl="0" algn="l">
@@ -19340,7 +19372,7 @@
               <a:buNone/>
             </a:pPr>
             <a:r>
-              <a:rPr b="0" i="0" lang="en-US" sz="1200">
+              <a:rPr b="0" i="0" lang="en-US" sz="1800">
                 <a:solidFill>
                   <a:srgbClr val="333333"/>
                 </a:solidFill>
@@ -19352,7 +19384,7 @@
               <a:t>–   </a:t>
             </a:r>
             <a:r>
-              <a:rPr b="1" i="0" lang="en-US" sz="1200">
+              <a:rPr b="1" i="0" lang="en-US" sz="1800">
                 <a:solidFill>
                   <a:srgbClr val="333333"/>
                 </a:solidFill>
@@ -19364,7 +19396,7 @@
               <a:t>Clase 13 –</a:t>
             </a:r>
             <a:r>
-              <a:rPr b="0" i="0" lang="en-US" sz="1200">
+              <a:rPr b="0" i="0" lang="en-US" sz="1800">
                 <a:solidFill>
                   <a:srgbClr val="333333"/>
                 </a:solidFill>
@@ -19375,7 +19407,7 @@
               </a:rPr>
               <a:t> Escalabilidad automática (02/11) · Autónoma</a:t>
             </a:r>
-            <a:endParaRPr/>
+            <a:endParaRPr sz="1800"/>
           </a:p>
           <a:p>
             <a:pPr indent="0" lvl="0" marL="0" marR="0" rtl="0" algn="l">
@@ -19388,7 +19420,7 @@
               <a:buNone/>
             </a:pPr>
             <a:r>
-              <a:rPr b="0" i="0" lang="en-US" sz="1200">
+              <a:rPr b="0" i="0" lang="en-US" sz="1800">
                 <a:solidFill>
                   <a:srgbClr val="333333"/>
                 </a:solidFill>
@@ -19400,7 +19432,7 @@
               <a:t>–   </a:t>
             </a:r>
             <a:r>
-              <a:rPr b="1" i="0" lang="en-US" sz="1200">
+              <a:rPr b="1" i="0" lang="en-US" sz="1800">
                 <a:solidFill>
                   <a:srgbClr val="333333"/>
                 </a:solidFill>
@@ -19412,7 +19444,7 @@
               <a:t>Clase 14 –</a:t>
             </a:r>
             <a:r>
-              <a:rPr b="0" i="0" lang="en-US" sz="1200">
+              <a:rPr b="0" i="0" lang="en-US" sz="1800">
                 <a:solidFill>
                   <a:srgbClr val="333333"/>
                 </a:solidFill>
@@ -19423,7 +19455,7 @@
               </a:rPr>
               <a:t> Parcial 3 (09/11) · Parcial 3 · presencial</a:t>
             </a:r>
-            <a:endParaRPr/>
+            <a:endParaRPr sz="1800"/>
           </a:p>
           <a:p>
             <a:pPr indent="0" lvl="0" marL="0" marR="0" rtl="0" algn="l">
@@ -19436,7 +19468,7 @@
               <a:buNone/>
             </a:pPr>
             <a:r>
-              <a:rPr b="0" i="0" lang="en-US" sz="1200">
+              <a:rPr b="0" i="0" lang="en-US" sz="1800">
                 <a:solidFill>
                   <a:srgbClr val="333333"/>
                 </a:solidFill>
@@ -19448,7 +19480,7 @@
               <a:t>–   </a:t>
             </a:r>
             <a:r>
-              <a:rPr b="1" i="0" lang="en-US" sz="1200">
+              <a:rPr b="1" i="0" lang="en-US" sz="1800">
                 <a:solidFill>
                   <a:srgbClr val="333333"/>
                 </a:solidFill>
@@ -19460,7 +19492,7 @@
               <a:t>Clase 15 –</a:t>
             </a:r>
             <a:r>
-              <a:rPr b="0" i="0" lang="en-US" sz="1200">
+              <a:rPr b="0" i="0" lang="en-US" sz="1800">
                 <a:solidFill>
                   <a:srgbClr val="333333"/>
                 </a:solidFill>
@@ -19471,7 +19503,7 @@
               </a:rPr>
               <a:t> Presentación del proyecto y cierre (16/11) · Autónoma</a:t>
             </a:r>
-            <a:endParaRPr/>
+            <a:endParaRPr sz="1800"/>
           </a:p>
         </p:txBody>
       </p:sp>

--- a/Arquitectura de Sistemas Computacionales/Clases/Presentacion del Curso - Arquitectura de Sistemas Computacionales.pptx
+++ b/Arquitectura de Sistemas Computacionales/Clases/Presentacion del Curso - Arquitectura de Sistemas Computacionales.pptx
@@ -3419,7 +3419,7 @@
                 </a:solidFill>
                 <a:latin typeface="Calibri"/>
               </a:rPr>
-              <a:t>Presencialidad asistida</a:t>
+              <a:t>Virtual</a:t>
             </a:r>
           </a:p>
           <a:p>

--- a/Arquitectura de Sistemas Computacionales/Clases/Presentacion del Curso - Arquitectura de Sistemas Computacionales.pptx
+++ b/Arquitectura de Sistemas Computacionales/Clases/Presentacion del Curso - Arquitectura de Sistemas Computacionales.pptx
@@ -7172,7 +7172,7 @@
                 </a:solidFill>
                 <a:latin typeface="Calibri"/>
               </a:rPr>
-              <a:t> (https://examlab.lovable.app/) — no es la plataforma oficial de la UNIAJC, la usamos solo para esto.</a:t>
+              <a:t> (https://uniaj.examlab.workers.dev/) — no es la plataforma oficial de la UNIAJC, la usamos solo para esto.</a:t>
             </a:r>
           </a:p>
           <a:p>

--- a/Arquitectura de Sistemas Computacionales/Clases/Presentacion del Curso - Arquitectura de Sistemas Computacionales.pptx
+++ b/Arquitectura de Sistemas Computacionales/Clases/Presentacion del Curso - Arquitectura de Sistemas Computacionales.pptx
@@ -4246,7 +4246,7 @@
       </p:sp>
       <p:pic>
         <p:nvPicPr>
-          <p:cNvPr id="19" name="Picture 18" descr="labex.png"/>
+          <p:cNvPr id="19" name="Picture 18" descr="killercoda.png"/>
           <p:cNvPicPr>
             <a:picLocks noChangeAspect="1"/>
           </p:cNvPicPr>
@@ -4296,7 +4296,7 @@
                 </a:solidFill>
                 <a:latin typeface="Calibri"/>
               </a:rPr>
-              <a:t>LabEx Docker Playground</a:t>
+              <a:t>Killercoda</a:t>
             </a:r>
           </a:p>
           <a:p>
@@ -4312,7 +4312,7 @@
                 </a:solidFill>
                 <a:latin typeface="Calibri"/>
               </a:rPr>
-              <a:t>Lab contenedores</a:t>
+              <a:t>Lab contenedores · 1 h</a:t>
             </a:r>
           </a:p>
         </p:txBody>

--- a/Arquitectura de Sistemas Computacionales/Clases/Presentacion del Curso - Arquitectura de Sistemas Computacionales.pptx
+++ b/Arquitectura de Sistemas Computacionales/Clases/Presentacion del Curso - Arquitectura de Sistemas Computacionales.pptx
@@ -6132,7 +6132,7 @@
               </a:spcAft>
             </a:pPr>
             <a:r>
-              <a:rPr sz="1600" b="0" i="0">
+              <a:rPr sz="2000" b="0" i="0">
                 <a:solidFill>
                   <a:srgbClr val="333333"/>
                 </a:solidFill>
@@ -6141,7 +6141,7 @@
               <a:t>–   Comprender y aplicar modelos de </a:t>
             </a:r>
             <a:r>
-              <a:rPr sz="1600" b="1" i="0">
+              <a:rPr sz="2000" b="1" i="0">
                 <a:solidFill>
                   <a:srgbClr val="333333"/>
                 </a:solidFill>
@@ -6150,7 +6150,7 @@
               <a:t>infraestructura moderna</a:t>
             </a:r>
             <a:r>
-              <a:rPr sz="1600" b="0" i="0">
+              <a:rPr sz="2000" b="0" i="0">
                 <a:solidFill>
                   <a:srgbClr val="333333"/>
                 </a:solidFill>
@@ -6166,7 +6166,7 @@
               </a:spcAft>
             </a:pPr>
             <a:r>
-              <a:rPr sz="1600" b="0" i="0">
+              <a:rPr sz="2000" b="0" i="0">
                 <a:solidFill>
                   <a:srgbClr val="333333"/>
                 </a:solidFill>
@@ -6182,7 +6182,7 @@
               </a:spcAft>
             </a:pPr>
             <a:r>
-              <a:rPr sz="1600" b="0" i="0">
+              <a:rPr sz="2000" b="0" i="0">
                 <a:solidFill>
                   <a:srgbClr val="333333"/>
                 </a:solidFill>
@@ -6191,7 +6191,7 @@
               <a:t>–   Práctica al servicio del </a:t>
             </a:r>
             <a:r>
-              <a:rPr sz="1600" b="1" i="0">
+              <a:rPr sz="2000" b="1" i="0">
                 <a:solidFill>
                   <a:srgbClr val="333333"/>
                 </a:solidFill>
@@ -6200,7 +6200,7 @@
               <a:t>Proyecto Integrador CloudLite</a:t>
             </a:r>
             <a:r>
-              <a:rPr sz="1600" b="0" i="0">
+              <a:rPr sz="2000" b="0" i="0">
                 <a:solidFill>
                   <a:srgbClr val="333333"/>
                 </a:solidFill>
@@ -6216,7 +6216,7 @@
               </a:spcAft>
             </a:pPr>
             <a:r>
-              <a:rPr sz="1600" b="0" i="0">
+              <a:rPr sz="2000" b="0" i="0">
                 <a:solidFill>
                   <a:srgbClr val="333333"/>
                 </a:solidFill>
@@ -6225,7 +6225,7 @@
               <a:t>–   </a:t>
             </a:r>
             <a:r>
-              <a:rPr sz="1600" b="1" i="0">
+              <a:rPr sz="2000" b="1" i="0">
                 <a:solidFill>
                   <a:srgbClr val="333333"/>
                 </a:solidFill>
@@ -6234,7 +6234,7 @@
               <a:t>Objeto de estudio:</a:t>
             </a:r>
             <a:r>
-              <a:rPr sz="1600" b="0" i="0">
+              <a:rPr sz="2000" b="0" i="0">
                 <a:solidFill>
                   <a:srgbClr val="333333"/>
                 </a:solidFill>
@@ -6454,7 +6454,7 @@
               </a:spcAft>
             </a:pPr>
             <a:r>
-              <a:rPr sz="1600" b="0" i="0">
+              <a:rPr sz="2000" b="0" i="0">
                 <a:solidFill>
                   <a:srgbClr val="333333"/>
                 </a:solidFill>
@@ -6463,7 +6463,7 @@
               <a:t>–   </a:t>
             </a:r>
             <a:r>
-              <a:rPr sz="1600" b="1" i="0">
+              <a:rPr sz="2000" b="1" i="0">
                 <a:solidFill>
                   <a:srgbClr val="333333"/>
                 </a:solidFill>
@@ -6472,7 +6472,7 @@
               <a:t>Objetivo:</a:t>
             </a:r>
             <a:r>
-              <a:rPr sz="1600" b="0" i="0">
+              <a:rPr sz="2000" b="0" i="0">
                 <a:solidFill>
                   <a:srgbClr val="333333"/>
                 </a:solidFill>
@@ -6488,7 +6488,7 @@
               </a:spcAft>
             </a:pPr>
             <a:r>
-              <a:rPr sz="1600" b="0" i="0">
+              <a:rPr sz="2000" b="0" i="0">
                 <a:solidFill>
                   <a:srgbClr val="333333"/>
                 </a:solidFill>
@@ -6497,7 +6497,7 @@
               <a:t>–   </a:t>
             </a:r>
             <a:r>
-              <a:rPr sz="1600" b="1" i="0">
+              <a:rPr sz="2000" b="1" i="0">
                 <a:solidFill>
                   <a:srgbClr val="333333"/>
                 </a:solidFill>
@@ -6506,7 +6506,7 @@
               <a:t>RAA1</a:t>
             </a:r>
             <a:r>
-              <a:rPr sz="1600" b="0" i="0">
+              <a:rPr sz="2000" b="0" i="0">
                 <a:solidFill>
                   <a:srgbClr val="333333"/>
                 </a:solidFill>
@@ -6522,7 +6522,7 @@
               </a:spcAft>
             </a:pPr>
             <a:r>
-              <a:rPr sz="1600" b="0" i="0">
+              <a:rPr sz="2000" b="0" i="0">
                 <a:solidFill>
                   <a:srgbClr val="333333"/>
                 </a:solidFill>
@@ -6531,7 +6531,7 @@
               <a:t>–   </a:t>
             </a:r>
             <a:r>
-              <a:rPr sz="1600" b="1" i="0">
+              <a:rPr sz="2000" b="1" i="0">
                 <a:solidFill>
                   <a:srgbClr val="333333"/>
                 </a:solidFill>
@@ -6540,7 +6540,7 @@
               <a:t>RAA2</a:t>
             </a:r>
             <a:r>
-              <a:rPr sz="1600" b="0" i="0">
+              <a:rPr sz="2000" b="0" i="0">
                 <a:solidFill>
                   <a:srgbClr val="333333"/>
                 </a:solidFill>
@@ -6556,7 +6556,7 @@
               </a:spcAft>
             </a:pPr>
             <a:r>
-              <a:rPr sz="1600" b="0" i="0">
+              <a:rPr sz="2000" b="0" i="0">
                 <a:solidFill>
                   <a:srgbClr val="333333"/>
                 </a:solidFill>
@@ -6565,7 +6565,7 @@
               <a:t>–   </a:t>
             </a:r>
             <a:r>
-              <a:rPr sz="1600" b="1" i="0">
+              <a:rPr sz="2000" b="1" i="0">
                 <a:solidFill>
                   <a:srgbClr val="333333"/>
                 </a:solidFill>
@@ -6574,7 +6574,7 @@
               <a:t>RAA3</a:t>
             </a:r>
             <a:r>
-              <a:rPr sz="1600" b="0" i="0">
+              <a:rPr sz="2000" b="0" i="0">
                 <a:solidFill>
                   <a:srgbClr val="333333"/>
                 </a:solidFill>
@@ -6794,7 +6794,7 @@
               </a:spcAft>
             </a:pPr>
             <a:r>
-              <a:rPr sz="1600" b="0" i="0">
+              <a:rPr sz="2000" b="0" i="0">
                 <a:solidFill>
                   <a:srgbClr val="333333"/>
                 </a:solidFill>
@@ -6803,7 +6803,7 @@
               <a:t>–   </a:t>
             </a:r>
             <a:r>
-              <a:rPr sz="1600" b="1" i="0">
+              <a:rPr sz="2000" b="1" i="0">
                 <a:solidFill>
                   <a:srgbClr val="333333"/>
                 </a:solidFill>
@@ -6812,7 +6812,7 @@
               <a:t>Sesión 0 (hoy)</a:t>
             </a:r>
             <a:r>
-              <a:rPr sz="1600" b="0" i="0">
+              <a:rPr sz="2000" b="0" i="0">
                 <a:solidFill>
                   <a:srgbClr val="333333"/>
                 </a:solidFill>
@@ -6821,7 +6821,7 @@
               <a:t> = encuadre del curso + evaluación + </a:t>
             </a:r>
             <a:r>
-              <a:rPr sz="1600" b="1" i="0">
+              <a:rPr sz="2000" b="1" i="0">
                 <a:solidFill>
                   <a:srgbClr val="333333"/>
                 </a:solidFill>
@@ -6830,7 +6830,7 @@
               <a:t>socialización del Proyecto Integrador CloudLite</a:t>
             </a:r>
             <a:r>
-              <a:rPr sz="1600" b="0" i="0">
+              <a:rPr sz="2000" b="0" i="0">
                 <a:solidFill>
                   <a:srgbClr val="333333"/>
                 </a:solidFill>
@@ -6846,7 +6846,7 @@
               </a:spcAft>
             </a:pPr>
             <a:r>
-              <a:rPr sz="1600" b="0" i="0">
+              <a:rPr sz="2000" b="0" i="0">
                 <a:solidFill>
                   <a:srgbClr val="333333"/>
                 </a:solidFill>
@@ -6855,7 +6855,7 @@
               <a:t>–   </a:t>
             </a:r>
             <a:r>
-              <a:rPr sz="1600" b="1" i="0">
+              <a:rPr sz="2000" b="1" i="0">
                 <a:solidFill>
                   <a:srgbClr val="333333"/>
                 </a:solidFill>
@@ -6864,7 +6864,7 @@
               <a:t>Clase 1</a:t>
             </a:r>
             <a:r>
-              <a:rPr sz="1600" b="0" i="0">
+              <a:rPr sz="2000" b="0" i="0">
                 <a:solidFill>
                   <a:srgbClr val="333333"/>
                 </a:solidFill>
@@ -6880,7 +6880,7 @@
               </a:spcAft>
             </a:pPr>
             <a:r>
-              <a:rPr sz="1600" b="0" i="0">
+              <a:rPr sz="2000" b="0" i="0">
                 <a:solidFill>
                   <a:srgbClr val="333333"/>
                 </a:solidFill>
@@ -6889,7 +6889,7 @@
               <a:t>–   De la sesión 2 en adelante, cada sesión sigue la misma estructura: </a:t>
             </a:r>
             <a:r>
-              <a:rPr sz="1600" b="1" i="0">
+              <a:rPr sz="2000" b="1" i="0">
                 <a:solidFill>
                   <a:srgbClr val="333333"/>
                 </a:solidFill>
@@ -6898,7 +6898,7 @@
               <a:t>Teoría Core breve</a:t>
             </a:r>
             <a:r>
-              <a:rPr sz="1600" b="0" i="0">
+              <a:rPr sz="2000" b="0" i="0">
                 <a:solidFill>
                   <a:srgbClr val="333333"/>
                 </a:solidFill>
@@ -6907,7 +6907,7 @@
               <a:t> → </a:t>
             </a:r>
             <a:r>
-              <a:rPr sz="1600" b="1" i="0">
+              <a:rPr sz="2000" b="1" i="0">
                 <a:solidFill>
                   <a:srgbClr val="333333"/>
                 </a:solidFill>
@@ -6916,7 +6916,7 @@
               <a:t>Taller PI CloudLite</a:t>
             </a:r>
             <a:r>
-              <a:rPr sz="1600" b="0" i="0">
+              <a:rPr sz="2000" b="0" i="0">
                 <a:solidFill>
                   <a:srgbClr val="333333"/>
                 </a:solidFill>
@@ -6925,7 +6925,7 @@
               <a:t> → </a:t>
             </a:r>
             <a:r>
-              <a:rPr sz="1600" b="1" i="0">
+              <a:rPr sz="2000" b="1" i="0">
                 <a:solidFill>
                   <a:srgbClr val="333333"/>
                 </a:solidFill>
@@ -6934,7 +6934,7 @@
               <a:t>cierre</a:t>
             </a:r>
             <a:r>
-              <a:rPr sz="1600" b="0" i="0">
+              <a:rPr sz="2000" b="0" i="0">
                 <a:solidFill>
                   <a:srgbClr val="333333"/>
                 </a:solidFill>
@@ -6943,7 +6943,7 @@
               <a:t>. Modalidad: </a:t>
             </a:r>
             <a:r>
-              <a:rPr sz="1600" b="1" i="0">
+              <a:rPr sz="2000" b="1" i="0">
                 <a:solidFill>
                   <a:srgbClr val="333333"/>
                 </a:solidFill>
@@ -6952,7 +6952,7 @@
               <a:t>todas las sesiones son virtuales síncronas por Meet</a:t>
             </a:r>
             <a:r>
-              <a:rPr sz="1600" b="0" i="0">
+              <a:rPr sz="2000" b="0" i="0">
                 <a:solidFill>
                   <a:srgbClr val="333333"/>
                 </a:solidFill>
@@ -6961,7 +6961,7 @@
               <a:t>, incluidos la sesión 1 y los parciales (</a:t>
             </a:r>
             <a:r>
-              <a:rPr sz="1600" b="1" i="0">
+              <a:rPr sz="2000" b="1" i="0">
                 <a:solidFill>
                   <a:srgbClr val="333333"/>
                 </a:solidFill>
@@ -6970,7 +6970,7 @@
               <a:t>5 / 9 / 12</a:t>
             </a:r>
             <a:r>
-              <a:rPr sz="1600" b="0" i="0">
+              <a:rPr sz="2000" b="0" i="0">
                 <a:solidFill>
                   <a:srgbClr val="333333"/>
                 </a:solidFill>
@@ -6979,7 +6979,7 @@
               <a:t>); festivos = </a:t>
             </a:r>
             <a:r>
-              <a:rPr sz="1600" b="1" i="0">
+              <a:rPr sz="2000" b="1" i="0">
                 <a:solidFill>
                   <a:srgbClr val="333333"/>
                 </a:solidFill>
@@ -6988,7 +6988,7 @@
               <a:t>clase autónoma</a:t>
             </a:r>
             <a:r>
-              <a:rPr sz="1600" b="0" i="0">
+              <a:rPr sz="2000" b="0" i="0">
                 <a:solidFill>
                   <a:srgbClr val="333333"/>
                 </a:solidFill>
@@ -6997,7 +6997,7 @@
               <a:t>. Dos sesiones son </a:t>
             </a:r>
             <a:r>
-              <a:rPr sz="1600" b="1" i="0">
+              <a:rPr sz="2000" b="1" i="0">
                 <a:solidFill>
                   <a:srgbClr val="333333"/>
                 </a:solidFill>
@@ -7006,7 +7006,7 @@
               <a:t>dobles</a:t>
             </a:r>
             <a:r>
-              <a:rPr sz="1600" b="0" i="0">
+              <a:rPr sz="2000" b="0" i="0">
                 <a:solidFill>
                   <a:srgbClr val="333333"/>
                 </a:solidFill>
@@ -7015,7 +7015,7 @@
               <a:t> (dos temas en un bloque) y la </a:t>
             </a:r>
             <a:r>
-              <a:rPr sz="1600" b="1" i="0">
+              <a:rPr sz="2000" b="1" i="0">
                 <a:solidFill>
                   <a:srgbClr val="333333"/>
                 </a:solidFill>
@@ -7024,7 +7024,7 @@
               <a:t>sesión 13 (16/11)</a:t>
             </a:r>
             <a:r>
-              <a:rPr sz="1600" b="0" i="0">
+              <a:rPr sz="2000" b="0" i="0">
                 <a:solidFill>
                   <a:srgbClr val="333333"/>
                 </a:solidFill>
@@ -7033,7 +7033,7 @@
               <a:t> es de </a:t>
             </a:r>
             <a:r>
-              <a:rPr sz="1600" b="1" i="0">
+              <a:rPr sz="2000" b="1" i="0">
                 <a:solidFill>
                   <a:srgbClr val="333333"/>
                 </a:solidFill>
@@ -7042,7 +7042,7 @@
               <a:t>sustentaciones</a:t>
             </a:r>
             <a:r>
-              <a:rPr sz="1600" b="0" i="0">
+              <a:rPr sz="2000" b="0" i="0">
                 <a:solidFill>
                   <a:srgbClr val="333333"/>
                 </a:solidFill>
@@ -7058,7 +7058,7 @@
               </a:spcAft>
             </a:pPr>
             <a:r>
-              <a:rPr sz="1600" b="0" i="0">
+              <a:rPr sz="2000" b="0" i="0">
                 <a:solidFill>
                   <a:srgbClr val="333333"/>
                 </a:solidFill>
@@ -7067,7 +7067,7 @@
               <a:t>–   Herramientas </a:t>
             </a:r>
             <a:r>
-              <a:rPr sz="1600" b="1" i="0">
+              <a:rPr sz="2000" b="1" i="0">
                 <a:solidFill>
                   <a:srgbClr val="333333"/>
                 </a:solidFill>
@@ -7076,7 +7076,7 @@
               <a:t>gratis + navegador</a:t>
             </a:r>
             <a:r>
-              <a:rPr sz="1600" b="0" i="0">
+              <a:rPr sz="2000" b="0" i="0">
                 <a:solidFill>
                   <a:srgbClr val="333333"/>
                 </a:solidFill>
@@ -7085,7 +7085,7 @@
               <a:t> (sin cloud de pago ni Docker Desktop). Talleres y quices/parciales se entregan/presentan en </a:t>
             </a:r>
             <a:r>
-              <a:rPr sz="1600" b="1" i="0">
+              <a:rPr sz="2000" b="1" i="0">
                 <a:solidFill>
                   <a:srgbClr val="333333"/>
                 </a:solidFill>
@@ -7094,7 +7094,7 @@
               <a:t>ExamLab</a:t>
             </a:r>
             <a:r>
-              <a:rPr sz="1600" b="0" i="0">
+              <a:rPr sz="2000" b="0" i="0">
                 <a:solidFill>
                   <a:srgbClr val="333333"/>
                 </a:solidFill>
@@ -7110,7 +7110,7 @@
               </a:spcAft>
             </a:pPr>
             <a:r>
-              <a:rPr sz="1600" b="0" i="0">
+              <a:rPr sz="2000" b="0" i="0">
                 <a:solidFill>
                   <a:srgbClr val="333333"/>
                 </a:solidFill>
@@ -7119,7 +7119,7 @@
               <a:t>–   Hilo conductor de todo el semestre: </a:t>
             </a:r>
             <a:r>
-              <a:rPr sz="1600" b="1" i="0">
+              <a:rPr sz="2000" b="1" i="0">
                 <a:solidFill>
                   <a:srgbClr val="333333"/>
                 </a:solidFill>
@@ -7128,7 +7128,7 @@
               <a:t>Proyecto Integrador CloudLite</a:t>
             </a:r>
             <a:r>
-              <a:rPr sz="1600" b="0" i="0">
+              <a:rPr sz="2000" b="0" i="0">
                 <a:solidFill>
                   <a:srgbClr val="333333"/>
                 </a:solidFill>
@@ -9184,7 +9184,7 @@
               </a:spcAft>
             </a:pPr>
             <a:r>
-              <a:rPr sz="1600" b="0" i="0">
+              <a:rPr sz="2000" b="0" i="0">
                 <a:solidFill>
                   <a:srgbClr val="333333"/>
                 </a:solidFill>
@@ -9193,7 +9193,7 @@
               <a:t>–   </a:t>
             </a:r>
             <a:r>
-              <a:rPr sz="1600" b="1" i="0">
+              <a:rPr sz="2000" b="1" i="0">
                 <a:solidFill>
                   <a:srgbClr val="333333"/>
                 </a:solidFill>
@@ -9202,7 +9202,7 @@
               <a:t>Socialización de hoy (Sesión 0):</a:t>
             </a:r>
             <a:r>
-              <a:rPr sz="1600" b="0" i="0">
+              <a:rPr sz="2000" b="0" i="0">
                 <a:solidFill>
                   <a:srgbClr val="333333"/>
                 </a:solidFill>
@@ -9218,7 +9218,7 @@
               </a:spcAft>
             </a:pPr>
             <a:r>
-              <a:rPr sz="1600" b="0" i="0">
+              <a:rPr sz="2000" b="0" i="0">
                 <a:solidFill>
                   <a:srgbClr val="333333"/>
                 </a:solidFill>
@@ -9227,7 +9227,7 @@
               <a:t>–   Diseño y simulación de una </a:t>
             </a:r>
             <a:r>
-              <a:rPr sz="1600" b="1" i="0">
+              <a:rPr sz="2000" b="1" i="0">
                 <a:solidFill>
                   <a:srgbClr val="333333"/>
                 </a:solidFill>
@@ -9236,7 +9236,7 @@
               <a:t>arquitectura cloud</a:t>
             </a:r>
             <a:r>
-              <a:rPr sz="1600" b="0" i="0">
+              <a:rPr sz="2000" b="0" i="0">
                 <a:solidFill>
                   <a:srgbClr val="333333"/>
                 </a:solidFill>
@@ -9252,7 +9252,7 @@
               </a:spcAft>
             </a:pPr>
             <a:r>
-              <a:rPr sz="1600" b="0" i="0">
+              <a:rPr sz="2000" b="0" i="0">
                 <a:solidFill>
                   <a:srgbClr val="333333"/>
                 </a:solidFill>
@@ -9268,7 +9268,7 @@
               </a:spcAft>
             </a:pPr>
             <a:r>
-              <a:rPr sz="1600" b="0" i="0">
+              <a:rPr sz="2000" b="0" i="0">
                 <a:solidFill>
                   <a:srgbClr val="333333"/>
                 </a:solidFill>
@@ -9277,7 +9277,7 @@
               <a:t>–   Pesa </a:t>
             </a:r>
             <a:r>
-              <a:rPr sz="1600" b="1" i="0">
+              <a:rPr sz="2000" b="1" i="0">
                 <a:solidFill>
                   <a:srgbClr val="333333"/>
                 </a:solidFill>
@@ -9286,7 +9286,7 @@
               <a:t>20%</a:t>
             </a:r>
             <a:r>
-              <a:rPr sz="1600" b="0" i="0">
+              <a:rPr sz="2000" b="0" i="0">
                 <a:solidFill>
                   <a:srgbClr val="333333"/>
                 </a:solidFill>
@@ -9302,7 +9302,7 @@
               </a:spcAft>
             </a:pPr>
             <a:r>
-              <a:rPr sz="1600" b="0" i="0">
+              <a:rPr sz="2000" b="0" i="0">
                 <a:solidFill>
                   <a:srgbClr val="333333"/>
                 </a:solidFill>
